--- a/src/assets/downloads/example-deck-paper.pptx
+++ b/src/assets/downloads/example-deck-paper.pptx
@@ -2351,7 +2351,7 @@
       </p:grpSpPr>
       <p:pic>
         <p:nvPicPr>
-          <p:cNvPr id="2" name="Image 0" descr="/var/folders/lw/rmylcyvd5rjfxk9g1z9rrm8w0000gq/T/showship-deck-M6692H/paper_cover.png">    </p:cNvPr>
+          <p:cNvPr id="2" name="Image 0" descr="/var/folders/lw/rmylcyvd5rjfxk9g1z9rrm8w0000gq/T/showship-deck-MhqDBR/paper_cover.png">    </p:cNvPr>
           <p:cNvPicPr>
             <a:picLocks noChangeAspect="1"/>
           </p:cNvPicPr>
@@ -2375,7 +2375,7 @@
       </p:pic>
       <p:pic>
         <p:nvPicPr>
-          <p:cNvPr id="3" name="Image 1" descr="/var/folders/lw/rmylcyvd5rjfxk9g1z9rrm8w0000gq/T/showship-deck-M6692H/logo_trimmed.png">    </p:cNvPr>
+          <p:cNvPr id="3" name="Image 1" descr="/var/folders/lw/rmylcyvd5rjfxk9g1z9rrm8w0000gq/T/showship-deck-MhqDBR/logo_trimmed.png">    </p:cNvPr>
           <p:cNvPicPr>
             <a:picLocks noChangeAspect="1"/>
           </p:cNvPicPr>
@@ -2936,7 +2936,7 @@
       </p:sp>
       <p:pic>
         <p:nvPicPr>
-          <p:cNvPr id="6" name="Image 0" descr="/var/folders/lw/rmylcyvd5rjfxk9g1z9rrm8w0000gq/T/showship-deck-M6692H/paper_mark.png">    </p:cNvPr>
+          <p:cNvPr id="6" name="Image 0" descr="/var/folders/lw/rmylcyvd5rjfxk9g1z9rrm8w0000gq/T/showship-deck-MhqDBR/paper_mark.png">    </p:cNvPr>
           <p:cNvPicPr>
             <a:picLocks noChangeAspect="1"/>
           </p:cNvPicPr>
@@ -3561,7 +3561,7 @@
       </p:sp>
       <p:pic>
         <p:nvPicPr>
-          <p:cNvPr id="6" name="Image 0" descr="/var/folders/lw/rmylcyvd5rjfxk9g1z9rrm8w0000gq/T/showship-deck-M6692H/paper_mark.png">    </p:cNvPr>
+          <p:cNvPr id="6" name="Image 0" descr="/var/folders/lw/rmylcyvd5rjfxk9g1z9rrm8w0000gq/T/showship-deck-MhqDBR/paper_mark.png">    </p:cNvPr>
           <p:cNvPicPr>
             <a:picLocks noChangeAspect="1"/>
           </p:cNvPicPr>
@@ -4728,7 +4728,7 @@
       </p:grpSpPr>
       <p:pic>
         <p:nvPicPr>
-          <p:cNvPr id="2" name="Image 0" descr="/var/folders/lw/rmylcyvd5rjfxk9g1z9rrm8w0000gq/T/showship-deck-M6692H/paper_cover.png">    </p:cNvPr>
+          <p:cNvPr id="2" name="Image 0" descr="/var/folders/lw/rmylcyvd5rjfxk9g1z9rrm8w0000gq/T/showship-deck-MhqDBR/paper_cover.png">    </p:cNvPr>
           <p:cNvPicPr>
             <a:picLocks noChangeAspect="1"/>
           </p:cNvPicPr>
@@ -4752,7 +4752,7 @@
       </p:pic>
       <p:pic>
         <p:nvPicPr>
-          <p:cNvPr id="3" name="Image 1" descr="/var/folders/lw/rmylcyvd5rjfxk9g1z9rrm8w0000gq/T/showship-deck-M6692H/logo_trimmed.png">    </p:cNvPr>
+          <p:cNvPr id="3" name="Image 1" descr="/var/folders/lw/rmylcyvd5rjfxk9g1z9rrm8w0000gq/T/showship-deck-MhqDBR/logo_trimmed.png">    </p:cNvPr>
           <p:cNvPicPr>
             <a:picLocks noChangeAspect="1"/>
           </p:cNvPicPr>
@@ -5235,7 +5235,7 @@
       </p:sp>
       <p:pic>
         <p:nvPicPr>
-          <p:cNvPr id="6" name="Image 0" descr="/var/folders/lw/rmylcyvd5rjfxk9g1z9rrm8w0000gq/T/showship-deck-M6692H/paper_mark.png">    </p:cNvPr>
+          <p:cNvPr id="6" name="Image 0" descr="/var/folders/lw/rmylcyvd5rjfxk9g1z9rrm8w0000gq/T/showship-deck-MhqDBR/paper_mark.png">    </p:cNvPr>
           <p:cNvPicPr>
             <a:picLocks noChangeAspect="1"/>
           </p:cNvPicPr>
@@ -6341,7 +6341,7 @@
       </p:sp>
       <p:pic>
         <p:nvPicPr>
-          <p:cNvPr id="6" name="Image 0" descr="/var/folders/lw/rmylcyvd5rjfxk9g1z9rrm8w0000gq/T/showship-deck-M6692H/paper_mark.png">    </p:cNvPr>
+          <p:cNvPr id="6" name="Image 0" descr="/var/folders/lw/rmylcyvd5rjfxk9g1z9rrm8w0000gq/T/showship-deck-MhqDBR/paper_mark.png">    </p:cNvPr>
           <p:cNvPicPr>
             <a:picLocks noChangeAspect="1"/>
           </p:cNvPicPr>
@@ -6565,7 +6565,7 @@
       </p:sp>
       <p:pic>
         <p:nvPicPr>
-          <p:cNvPr id="12" name="Image 1" descr="/var/folders/lw/rmylcyvd5rjfxk9g1z9rrm8w0000gq/T/showship-deck-M6692H/paper_tl_1.png">    </p:cNvPr>
+          <p:cNvPr id="12" name="Image 1" descr="/var/folders/lw/rmylcyvd5rjfxk9g1z9rrm8w0000gq/T/showship-deck-MhqDBR/paper_tl_1.png">    </p:cNvPr>
           <p:cNvPicPr>
             <a:picLocks noChangeAspect="1"/>
           </p:cNvPicPr>
@@ -7359,7 +7359,7 @@
       </p:sp>
       <p:pic>
         <p:nvPicPr>
-          <p:cNvPr id="6" name="Image 0" descr="/var/folders/lw/rmylcyvd5rjfxk9g1z9rrm8w0000gq/T/showship-deck-M6692H/paper_mark.png">    </p:cNvPr>
+          <p:cNvPr id="6" name="Image 0" descr="/var/folders/lw/rmylcyvd5rjfxk9g1z9rrm8w0000gq/T/showship-deck-MhqDBR/paper_mark.png">    </p:cNvPr>
           <p:cNvPicPr>
             <a:picLocks noChangeAspect="1"/>
           </p:cNvPicPr>
@@ -8495,7 +8495,7 @@
       </p:sp>
       <p:pic>
         <p:nvPicPr>
-          <p:cNvPr id="6" name="Image 0" descr="/var/folders/lw/rmylcyvd5rjfxk9g1z9rrm8w0000gq/T/showship-deck-M6692H/paper_mark.png">    </p:cNvPr>
+          <p:cNvPr id="6" name="Image 0" descr="/var/folders/lw/rmylcyvd5rjfxk9g1z9rrm8w0000gq/T/showship-deck-MhqDBR/paper_mark.png">    </p:cNvPr>
           <p:cNvPicPr>
             <a:picLocks noChangeAspect="1"/>
           </p:cNvPicPr>
@@ -10068,7 +10068,7 @@
       </p:sp>
       <p:pic>
         <p:nvPicPr>
-          <p:cNvPr id="6" name="Image 0" descr="/var/folders/lw/rmylcyvd5rjfxk9g1z9rrm8w0000gq/T/showship-deck-M6692H/paper_mark.png">    </p:cNvPr>
+          <p:cNvPr id="6" name="Image 0" descr="/var/folders/lw/rmylcyvd5rjfxk9g1z9rrm8w0000gq/T/showship-deck-MhqDBR/paper_mark.png">    </p:cNvPr>
           <p:cNvPicPr>
             <a:picLocks noChangeAspect="1"/>
           </p:cNvPicPr>
@@ -10761,7 +10761,7 @@
         <p:spPr>
           <a:xfrm>
             <a:off x="4230624" y="1783080"/>
-            <a:ext cx="0" cy="4160520"/>
+            <a:ext cx="0" cy="3694938"/>
           </a:xfrm>
           <a:prstGeom prst="line">
             <a:avLst/>
@@ -11086,7 +11086,7 @@
         <p:spPr>
           <a:xfrm>
             <a:off x="4843272" y="4536186"/>
-            <a:ext cx="2749296" cy="390144"/>
+            <a:ext cx="2749296" cy="222504"/>
           </a:xfrm>
           <a:prstGeom prst="rect">
             <a:avLst/>
@@ -11124,7 +11124,7 @@
         </p:nvSpPr>
         <p:spPr>
           <a:xfrm>
-            <a:off x="4596384" y="4981194"/>
+            <a:off x="4596384" y="4813554"/>
             <a:ext cx="118872" cy="118872"/>
           </a:xfrm>
           <a:prstGeom prst="ellipse">
@@ -11144,7 +11144,7 @@
         </p:nvSpPr>
         <p:spPr>
           <a:xfrm>
-            <a:off x="4843272" y="4926330"/>
+            <a:off x="4843272" y="4758690"/>
             <a:ext cx="2749296" cy="222504"/>
           </a:xfrm>
           <a:prstGeom prst="rect">
@@ -11183,7 +11183,7 @@
         </p:nvSpPr>
         <p:spPr>
           <a:xfrm>
-            <a:off x="4596384" y="5203698"/>
+            <a:off x="4596384" y="5036058"/>
             <a:ext cx="118872" cy="118872"/>
           </a:xfrm>
           <a:prstGeom prst="ellipse">
@@ -11203,7 +11203,7 @@
         </p:nvSpPr>
         <p:spPr>
           <a:xfrm>
-            <a:off x="4843272" y="5148834"/>
+            <a:off x="4843272" y="4981194"/>
             <a:ext cx="2749296" cy="222504"/>
           </a:xfrm>
           <a:prstGeom prst="rect">
@@ -11266,7 +11266,7 @@
         <p:spPr>
           <a:xfrm>
             <a:off x="7958328" y="1783080"/>
-            <a:ext cx="0" cy="4160520"/>
+            <a:ext cx="0" cy="3694938"/>
           </a:xfrm>
           <a:prstGeom prst="line">
             <a:avLst/>
@@ -11431,7 +11431,7 @@
         <p:spPr>
           <a:xfrm>
             <a:off x="8324088" y="2871597"/>
-            <a:ext cx="2996184" cy="792480"/>
+            <a:ext cx="2996184" cy="594360"/>
           </a:xfrm>
           <a:prstGeom prst="rect">
             <a:avLst/>
@@ -11472,7 +11472,7 @@
         </p:nvSpPr>
         <p:spPr>
           <a:xfrm>
-            <a:off x="8324088" y="3801237"/>
+            <a:off x="8324088" y="3603117"/>
             <a:ext cx="2996184" cy="228600"/>
           </a:xfrm>
           <a:prstGeom prst="rect">
@@ -11511,7 +11511,7 @@
         </p:nvSpPr>
         <p:spPr>
           <a:xfrm>
-            <a:off x="8324088" y="4130421"/>
+            <a:off x="8324088" y="3932301"/>
             <a:ext cx="118872" cy="118872"/>
           </a:xfrm>
           <a:prstGeom prst="ellipse">
@@ -11533,7 +11533,7 @@
         </p:nvSpPr>
         <p:spPr>
           <a:xfrm>
-            <a:off x="8570976" y="4075557"/>
+            <a:off x="8570976" y="3877437"/>
             <a:ext cx="2749296" cy="222504"/>
           </a:xfrm>
           <a:prstGeom prst="rect">
@@ -11572,7 +11572,7 @@
         </p:nvSpPr>
         <p:spPr>
           <a:xfrm>
-            <a:off x="8324088" y="4352925"/>
+            <a:off x="8324088" y="4154805"/>
             <a:ext cx="118872" cy="118872"/>
           </a:xfrm>
           <a:prstGeom prst="ellipse">
@@ -11594,7 +11594,7 @@
         </p:nvSpPr>
         <p:spPr>
           <a:xfrm>
-            <a:off x="8570976" y="4298061"/>
+            <a:off x="8570976" y="4099941"/>
             <a:ext cx="2749296" cy="222504"/>
           </a:xfrm>
           <a:prstGeom prst="rect">
@@ -11633,7 +11633,7 @@
         </p:nvSpPr>
         <p:spPr>
           <a:xfrm>
-            <a:off x="8324088" y="4575429"/>
+            <a:off x="8324088" y="4377309"/>
             <a:ext cx="118872" cy="118872"/>
           </a:xfrm>
           <a:prstGeom prst="ellipse">
@@ -11655,7 +11655,7 @@
         </p:nvSpPr>
         <p:spPr>
           <a:xfrm>
-            <a:off x="8570976" y="4520565"/>
+            <a:off x="8570976" y="4322445"/>
             <a:ext cx="2749296" cy="222504"/>
           </a:xfrm>
           <a:prstGeom prst="rect">
@@ -11694,7 +11694,7 @@
         </p:nvSpPr>
         <p:spPr>
           <a:xfrm>
-            <a:off x="640080" y="5989320"/>
+            <a:off x="640080" y="5615178"/>
             <a:ext cx="10908792" cy="274320"/>
           </a:xfrm>
           <a:prstGeom prst="rect">
@@ -11901,7 +11901,7 @@
       </p:sp>
       <p:pic>
         <p:nvPicPr>
-          <p:cNvPr id="6" name="Image 0" descr="/var/folders/lw/rmylcyvd5rjfxk9g1z9rrm8w0000gq/T/showship-deck-M6692H/paper_mark.png">    </p:cNvPr>
+          <p:cNvPr id="6" name="Image 0" descr="/var/folders/lw/rmylcyvd5rjfxk9g1z9rrm8w0000gq/T/showship-deck-MhqDBR/paper_mark.png">    </p:cNvPr>
           <p:cNvPicPr>
             <a:picLocks noChangeAspect="1"/>
           </p:cNvPicPr>
@@ -12974,7 +12974,7 @@
       </p:sp>
       <p:pic>
         <p:nvPicPr>
-          <p:cNvPr id="6" name="Image 0" descr="/var/folders/lw/rmylcyvd5rjfxk9g1z9rrm8w0000gq/T/showship-deck-M6692H/paper_mark.png">    </p:cNvPr>
+          <p:cNvPr id="6" name="Image 0" descr="/var/folders/lw/rmylcyvd5rjfxk9g1z9rrm8w0000gq/T/showship-deck-MhqDBR/paper_mark.png">    </p:cNvPr>
           <p:cNvPicPr>
             <a:picLocks noChangeAspect="1"/>
           </p:cNvPicPr>
@@ -13680,7 +13680,7 @@
       </p:sp>
       <p:pic>
         <p:nvPicPr>
-          <p:cNvPr id="6" name="Image 0" descr="/var/folders/lw/rmylcyvd5rjfxk9g1z9rrm8w0000gq/T/showship-deck-M6692H/paper_mark.png">    </p:cNvPr>
+          <p:cNvPr id="6" name="Image 0" descr="/var/folders/lw/rmylcyvd5rjfxk9g1z9rrm8w0000gq/T/showship-deck-MhqDBR/paper_mark.png">    </p:cNvPr>
           <p:cNvPicPr>
             <a:picLocks noChangeAspect="1"/>
           </p:cNvPicPr>

--- a/src/assets/downloads/example-deck-paper.pptx
+++ b/src/assets/downloads/example-deck-paper.pptx
@@ -2351,7 +2351,7 @@
       </p:grpSpPr>
       <p:pic>
         <p:nvPicPr>
-          <p:cNvPr id="2" name="Image 0" descr="/var/folders/lw/rmylcyvd5rjfxk9g1z9rrm8w0000gq/T/showship-deck-MhqDBR/paper_cover.png">    </p:cNvPr>
+          <p:cNvPr id="2" name="Image 0" descr="/var/folders/lw/rmylcyvd5rjfxk9g1z9rrm8w0000gq/T/showship-deck-2ZEKJ6/paper_cover.png">    </p:cNvPr>
           <p:cNvPicPr>
             <a:picLocks noChangeAspect="1"/>
           </p:cNvPicPr>
@@ -2375,7 +2375,7 @@
       </p:pic>
       <p:pic>
         <p:nvPicPr>
-          <p:cNvPr id="3" name="Image 1" descr="/var/folders/lw/rmylcyvd5rjfxk9g1z9rrm8w0000gq/T/showship-deck-MhqDBR/logo_trimmed.png">    </p:cNvPr>
+          <p:cNvPr id="3" name="Image 1" descr="/var/folders/lw/rmylcyvd5rjfxk9g1z9rrm8w0000gq/T/showship-deck-2ZEKJ6/logo_trimmed.png">    </p:cNvPr>
           <p:cNvPicPr>
             <a:picLocks noChangeAspect="1"/>
           </p:cNvPicPr>
@@ -2936,7 +2936,7 @@
       </p:sp>
       <p:pic>
         <p:nvPicPr>
-          <p:cNvPr id="6" name="Image 0" descr="/var/folders/lw/rmylcyvd5rjfxk9g1z9rrm8w0000gq/T/showship-deck-MhqDBR/paper_mark.png">    </p:cNvPr>
+          <p:cNvPr id="6" name="Image 0" descr="/var/folders/lw/rmylcyvd5rjfxk9g1z9rrm8w0000gq/T/showship-deck-2ZEKJ6/paper_mark.png">    </p:cNvPr>
           <p:cNvPicPr>
             <a:picLocks noChangeAspect="1"/>
           </p:cNvPicPr>
@@ -3561,7 +3561,7 @@
       </p:sp>
       <p:pic>
         <p:nvPicPr>
-          <p:cNvPr id="6" name="Image 0" descr="/var/folders/lw/rmylcyvd5rjfxk9g1z9rrm8w0000gq/T/showship-deck-MhqDBR/paper_mark.png">    </p:cNvPr>
+          <p:cNvPr id="6" name="Image 0" descr="/var/folders/lw/rmylcyvd5rjfxk9g1z9rrm8w0000gq/T/showship-deck-2ZEKJ6/paper_mark.png">    </p:cNvPr>
           <p:cNvPicPr>
             <a:picLocks noChangeAspect="1"/>
           </p:cNvPicPr>
@@ -4615,18 +4615,18 @@
         </p:nvSpPr>
         <p:spPr>
           <a:xfrm>
-            <a:off x="10936224" y="5239512"/>
+            <a:off x="10424160" y="5239512"/>
             <a:ext cx="118872" cy="118872"/>
           </a:xfrm>
           <a:prstGeom prst="ellipse">
             <a:avLst/>
           </a:prstGeom>
           <a:solidFill>
-            <a:srgbClr val="6C4CF5"/>
+            <a:srgbClr val="F7F4EE"/>
           </a:solidFill>
-          <a:ln w="12700">
+          <a:ln w="19050">
             <a:solidFill>
-              <a:srgbClr val="6C4CF5"/>
+              <a:srgbClr val="68667A"/>
             </a:solidFill>
             <a:prstDash val="solid"/>
           </a:ln>
@@ -4640,8 +4640,8 @@
         </p:nvSpPr>
         <p:spPr>
           <a:xfrm>
-            <a:off x="11137392" y="5175504"/>
-            <a:ext cx="612648" cy="256032"/>
+            <a:off x="10625328" y="5175504"/>
+            <a:ext cx="1124712" cy="256032"/>
           </a:xfrm>
           <a:prstGeom prst="rect">
             <a:avLst/>
@@ -4659,13 +4659,13 @@
             <a:r>
               <a:rPr lang="en-US" sz="1100" b="1" dirty="0">
                 <a:solidFill>
-                  <a:srgbClr val="6C4CF5"/>
-                </a:solidFill>
-                <a:latin typeface="Poppins" pitchFamily="34" charset="0"/>
-                <a:ea typeface="Poppins" pitchFamily="34" charset="-122"/>
-                <a:cs typeface="Poppins" pitchFamily="34" charset="-120"/>
-              </a:rPr>
-              <a:t>Done</a:t>
+                  <a:srgbClr val="68667A"/>
+                </a:solidFill>
+                <a:latin typeface="Poppins" pitchFamily="34" charset="0"/>
+                <a:ea typeface="Poppins" pitchFamily="34" charset="-122"/>
+                <a:cs typeface="Poppins" pitchFamily="34" charset="-120"/>
+              </a:rPr>
+              <a:t>Not started</a:t>
             </a:r>
             <a:endParaRPr lang="en-US" sz="1100" dirty="0"/>
           </a:p>
@@ -4728,7 +4728,7 @@
       </p:grpSpPr>
       <p:pic>
         <p:nvPicPr>
-          <p:cNvPr id="2" name="Image 0" descr="/var/folders/lw/rmylcyvd5rjfxk9g1z9rrm8w0000gq/T/showship-deck-MhqDBR/paper_cover.png">    </p:cNvPr>
+          <p:cNvPr id="2" name="Image 0" descr="/var/folders/lw/rmylcyvd5rjfxk9g1z9rrm8w0000gq/T/showship-deck-2ZEKJ6/paper_cover.png">    </p:cNvPr>
           <p:cNvPicPr>
             <a:picLocks noChangeAspect="1"/>
           </p:cNvPicPr>
@@ -4752,7 +4752,7 @@
       </p:pic>
       <p:pic>
         <p:nvPicPr>
-          <p:cNvPr id="3" name="Image 1" descr="/var/folders/lw/rmylcyvd5rjfxk9g1z9rrm8w0000gq/T/showship-deck-MhqDBR/logo_trimmed.png">    </p:cNvPr>
+          <p:cNvPr id="3" name="Image 1" descr="/var/folders/lw/rmylcyvd5rjfxk9g1z9rrm8w0000gq/T/showship-deck-2ZEKJ6/logo_trimmed.png">    </p:cNvPr>
           <p:cNvPicPr>
             <a:picLocks noChangeAspect="1"/>
           </p:cNvPicPr>
@@ -5235,7 +5235,7 @@
       </p:sp>
       <p:pic>
         <p:nvPicPr>
-          <p:cNvPr id="6" name="Image 0" descr="/var/folders/lw/rmylcyvd5rjfxk9g1z9rrm8w0000gq/T/showship-deck-MhqDBR/paper_mark.png">    </p:cNvPr>
+          <p:cNvPr id="6" name="Image 0" descr="/var/folders/lw/rmylcyvd5rjfxk9g1z9rrm8w0000gq/T/showship-deck-2ZEKJ6/paper_mark.png">    </p:cNvPr>
           <p:cNvPicPr>
             <a:picLocks noChangeAspect="1"/>
           </p:cNvPicPr>
@@ -6341,7 +6341,7 @@
       </p:sp>
       <p:pic>
         <p:nvPicPr>
-          <p:cNvPr id="6" name="Image 0" descr="/var/folders/lw/rmylcyvd5rjfxk9g1z9rrm8w0000gq/T/showship-deck-MhqDBR/paper_mark.png">    </p:cNvPr>
+          <p:cNvPr id="6" name="Image 0" descr="/var/folders/lw/rmylcyvd5rjfxk9g1z9rrm8w0000gq/T/showship-deck-2ZEKJ6/paper_mark.png">    </p:cNvPr>
           <p:cNvPicPr>
             <a:picLocks noChangeAspect="1"/>
           </p:cNvPicPr>
@@ -6565,7 +6565,7 @@
       </p:sp>
       <p:pic>
         <p:nvPicPr>
-          <p:cNvPr id="12" name="Image 1" descr="/var/folders/lw/rmylcyvd5rjfxk9g1z9rrm8w0000gq/T/showship-deck-MhqDBR/paper_tl_1.png">    </p:cNvPr>
+          <p:cNvPr id="12" name="Image 1" descr="/var/folders/lw/rmylcyvd5rjfxk9g1z9rrm8w0000gq/T/showship-deck-2ZEKJ6/paper_tl_1.png">    </p:cNvPr>
           <p:cNvPicPr>
             <a:picLocks noChangeAspect="1"/>
           </p:cNvPicPr>
@@ -7359,7 +7359,7 @@
       </p:sp>
       <p:pic>
         <p:nvPicPr>
-          <p:cNvPr id="6" name="Image 0" descr="/var/folders/lw/rmylcyvd5rjfxk9g1z9rrm8w0000gq/T/showship-deck-MhqDBR/paper_mark.png">    </p:cNvPr>
+          <p:cNvPr id="6" name="Image 0" descr="/var/folders/lw/rmylcyvd5rjfxk9g1z9rrm8w0000gq/T/showship-deck-2ZEKJ6/paper_mark.png">    </p:cNvPr>
           <p:cNvPicPr>
             <a:picLocks noChangeAspect="1"/>
           </p:cNvPicPr>
@@ -8495,7 +8495,7 @@
       </p:sp>
       <p:pic>
         <p:nvPicPr>
-          <p:cNvPr id="6" name="Image 0" descr="/var/folders/lw/rmylcyvd5rjfxk9g1z9rrm8w0000gq/T/showship-deck-MhqDBR/paper_mark.png">    </p:cNvPr>
+          <p:cNvPr id="6" name="Image 0" descr="/var/folders/lw/rmylcyvd5rjfxk9g1z9rrm8w0000gq/T/showship-deck-2ZEKJ6/paper_mark.png">    </p:cNvPr>
           <p:cNvPicPr>
             <a:picLocks noChangeAspect="1"/>
           </p:cNvPicPr>
@@ -10068,7 +10068,7 @@
       </p:sp>
       <p:pic>
         <p:nvPicPr>
-          <p:cNvPr id="6" name="Image 0" descr="/var/folders/lw/rmylcyvd5rjfxk9g1z9rrm8w0000gq/T/showship-deck-MhqDBR/paper_mark.png">    </p:cNvPr>
+          <p:cNvPr id="6" name="Image 0" descr="/var/folders/lw/rmylcyvd5rjfxk9g1z9rrm8w0000gq/T/showship-deck-2ZEKJ6/paper_mark.png">    </p:cNvPr>
           <p:cNvPicPr>
             <a:picLocks noChangeAspect="1"/>
           </p:cNvPicPr>
@@ -11901,7 +11901,7 @@
       </p:sp>
       <p:pic>
         <p:nvPicPr>
-          <p:cNvPr id="6" name="Image 0" descr="/var/folders/lw/rmylcyvd5rjfxk9g1z9rrm8w0000gq/T/showship-deck-MhqDBR/paper_mark.png">    </p:cNvPr>
+          <p:cNvPr id="6" name="Image 0" descr="/var/folders/lw/rmylcyvd5rjfxk9g1z9rrm8w0000gq/T/showship-deck-2ZEKJ6/paper_mark.png">    </p:cNvPr>
           <p:cNvPicPr>
             <a:picLocks noChangeAspect="1"/>
           </p:cNvPicPr>
@@ -12974,7 +12974,7 @@
       </p:sp>
       <p:pic>
         <p:nvPicPr>
-          <p:cNvPr id="6" name="Image 0" descr="/var/folders/lw/rmylcyvd5rjfxk9g1z9rrm8w0000gq/T/showship-deck-MhqDBR/paper_mark.png">    </p:cNvPr>
+          <p:cNvPr id="6" name="Image 0" descr="/var/folders/lw/rmylcyvd5rjfxk9g1z9rrm8w0000gq/T/showship-deck-2ZEKJ6/paper_mark.png">    </p:cNvPr>
           <p:cNvPicPr>
             <a:picLocks noChangeAspect="1"/>
           </p:cNvPicPr>
@@ -13680,7 +13680,7 @@
       </p:sp>
       <p:pic>
         <p:nvPicPr>
-          <p:cNvPr id="6" name="Image 0" descr="/var/folders/lw/rmylcyvd5rjfxk9g1z9rrm8w0000gq/T/showship-deck-MhqDBR/paper_mark.png">    </p:cNvPr>
+          <p:cNvPr id="6" name="Image 0" descr="/var/folders/lw/rmylcyvd5rjfxk9g1z9rrm8w0000gq/T/showship-deck-2ZEKJ6/paper_mark.png">    </p:cNvPr>
           <p:cNvPicPr>
             <a:picLocks noChangeAspect="1"/>
           </p:cNvPicPr>

--- a/src/assets/downloads/example-deck-paper.pptx
+++ b/src/assets/downloads/example-deck-paper.pptx
@@ -2351,7 +2351,7 @@
       </p:grpSpPr>
       <p:pic>
         <p:nvPicPr>
-          <p:cNvPr id="2" name="Image 0" descr="/var/folders/lw/rmylcyvd5rjfxk9g1z9rrm8w0000gq/T/showship-deck-2ZEKJ6/paper_cover.png">    </p:cNvPr>
+          <p:cNvPr id="2" name="Image 0" descr="/var/folders/lw/rmylcyvd5rjfxk9g1z9rrm8w0000gq/T/showship-deck-tqWCrW/paper_cover.png">    </p:cNvPr>
           <p:cNvPicPr>
             <a:picLocks noChangeAspect="1"/>
           </p:cNvPicPr>
@@ -2375,7 +2375,7 @@
       </p:pic>
       <p:pic>
         <p:nvPicPr>
-          <p:cNvPr id="3" name="Image 1" descr="/var/folders/lw/rmylcyvd5rjfxk9g1z9rrm8w0000gq/T/showship-deck-2ZEKJ6/logo_trimmed.png">    </p:cNvPr>
+          <p:cNvPr id="3" name="Image 1" descr="/var/folders/lw/rmylcyvd5rjfxk9g1z9rrm8w0000gq/T/showship-deck-tqWCrW/logo_trimmed.png">    </p:cNvPr>
           <p:cNvPicPr>
             <a:picLocks noChangeAspect="1"/>
           </p:cNvPicPr>
@@ -2936,7 +2936,7 @@
       </p:sp>
       <p:pic>
         <p:nvPicPr>
-          <p:cNvPr id="6" name="Image 0" descr="/var/folders/lw/rmylcyvd5rjfxk9g1z9rrm8w0000gq/T/showship-deck-2ZEKJ6/paper_mark.png">    </p:cNvPr>
+          <p:cNvPr id="6" name="Image 0" descr="/var/folders/lw/rmylcyvd5rjfxk9g1z9rrm8w0000gq/T/showship-deck-tqWCrW/paper_mark.png">    </p:cNvPr>
           <p:cNvPicPr>
             <a:picLocks noChangeAspect="1"/>
           </p:cNvPicPr>
@@ -3561,7 +3561,7 @@
       </p:sp>
       <p:pic>
         <p:nvPicPr>
-          <p:cNvPr id="6" name="Image 0" descr="/var/folders/lw/rmylcyvd5rjfxk9g1z9rrm8w0000gq/T/showship-deck-2ZEKJ6/paper_mark.png">    </p:cNvPr>
+          <p:cNvPr id="6" name="Image 0" descr="/var/folders/lw/rmylcyvd5rjfxk9g1z9rrm8w0000gq/T/showship-deck-tqWCrW/paper_mark.png">    </p:cNvPr>
           <p:cNvPicPr>
             <a:picLocks noChangeAspect="1"/>
           </p:cNvPicPr>
@@ -4728,7 +4728,7 @@
       </p:grpSpPr>
       <p:pic>
         <p:nvPicPr>
-          <p:cNvPr id="2" name="Image 0" descr="/var/folders/lw/rmylcyvd5rjfxk9g1z9rrm8w0000gq/T/showship-deck-2ZEKJ6/paper_cover.png">    </p:cNvPr>
+          <p:cNvPr id="2" name="Image 0" descr="/var/folders/lw/rmylcyvd5rjfxk9g1z9rrm8w0000gq/T/showship-deck-tqWCrW/paper_cover.png">    </p:cNvPr>
           <p:cNvPicPr>
             <a:picLocks noChangeAspect="1"/>
           </p:cNvPicPr>
@@ -4752,7 +4752,7 @@
       </p:pic>
       <p:pic>
         <p:nvPicPr>
-          <p:cNvPr id="3" name="Image 1" descr="/var/folders/lw/rmylcyvd5rjfxk9g1z9rrm8w0000gq/T/showship-deck-2ZEKJ6/logo_trimmed.png">    </p:cNvPr>
+          <p:cNvPr id="3" name="Image 1" descr="/var/folders/lw/rmylcyvd5rjfxk9g1z9rrm8w0000gq/T/showship-deck-tqWCrW/logo_trimmed.png">    </p:cNvPr>
           <p:cNvPicPr>
             <a:picLocks noChangeAspect="1"/>
           </p:cNvPicPr>
@@ -5235,7 +5235,7 @@
       </p:sp>
       <p:pic>
         <p:nvPicPr>
-          <p:cNvPr id="6" name="Image 0" descr="/var/folders/lw/rmylcyvd5rjfxk9g1z9rrm8w0000gq/T/showship-deck-2ZEKJ6/paper_mark.png">    </p:cNvPr>
+          <p:cNvPr id="6" name="Image 0" descr="/var/folders/lw/rmylcyvd5rjfxk9g1z9rrm8w0000gq/T/showship-deck-tqWCrW/paper_mark.png">    </p:cNvPr>
           <p:cNvPicPr>
             <a:picLocks noChangeAspect="1"/>
           </p:cNvPicPr>
@@ -6341,7 +6341,7 @@
       </p:sp>
       <p:pic>
         <p:nvPicPr>
-          <p:cNvPr id="6" name="Image 0" descr="/var/folders/lw/rmylcyvd5rjfxk9g1z9rrm8w0000gq/T/showship-deck-2ZEKJ6/paper_mark.png">    </p:cNvPr>
+          <p:cNvPr id="6" name="Image 0" descr="/var/folders/lw/rmylcyvd5rjfxk9g1z9rrm8w0000gq/T/showship-deck-tqWCrW/paper_mark.png">    </p:cNvPr>
           <p:cNvPicPr>
             <a:picLocks noChangeAspect="1"/>
           </p:cNvPicPr>
@@ -6565,7 +6565,7 @@
       </p:sp>
       <p:pic>
         <p:nvPicPr>
-          <p:cNvPr id="12" name="Image 1" descr="/var/folders/lw/rmylcyvd5rjfxk9g1z9rrm8w0000gq/T/showship-deck-2ZEKJ6/paper_tl_1.png">    </p:cNvPr>
+          <p:cNvPr id="12" name="Image 1" descr="/var/folders/lw/rmylcyvd5rjfxk9g1z9rrm8w0000gq/T/showship-deck-tqWCrW/paper_tl_1.png">    </p:cNvPr>
           <p:cNvPicPr>
             <a:picLocks noChangeAspect="1"/>
           </p:cNvPicPr>
@@ -7359,7 +7359,7 @@
       </p:sp>
       <p:pic>
         <p:nvPicPr>
-          <p:cNvPr id="6" name="Image 0" descr="/var/folders/lw/rmylcyvd5rjfxk9g1z9rrm8w0000gq/T/showship-deck-2ZEKJ6/paper_mark.png">    </p:cNvPr>
+          <p:cNvPr id="6" name="Image 0" descr="/var/folders/lw/rmylcyvd5rjfxk9g1z9rrm8w0000gq/T/showship-deck-tqWCrW/paper_mark.png">    </p:cNvPr>
           <p:cNvPicPr>
             <a:picLocks noChangeAspect="1"/>
           </p:cNvPicPr>
@@ -8495,7 +8495,7 @@
       </p:sp>
       <p:pic>
         <p:nvPicPr>
-          <p:cNvPr id="6" name="Image 0" descr="/var/folders/lw/rmylcyvd5rjfxk9g1z9rrm8w0000gq/T/showship-deck-2ZEKJ6/paper_mark.png">    </p:cNvPr>
+          <p:cNvPr id="6" name="Image 0" descr="/var/folders/lw/rmylcyvd5rjfxk9g1z9rrm8w0000gq/T/showship-deck-tqWCrW/paper_mark.png">    </p:cNvPr>
           <p:cNvPicPr>
             <a:picLocks noChangeAspect="1"/>
           </p:cNvPicPr>
@@ -10068,7 +10068,7 @@
       </p:sp>
       <p:pic>
         <p:nvPicPr>
-          <p:cNvPr id="6" name="Image 0" descr="/var/folders/lw/rmylcyvd5rjfxk9g1z9rrm8w0000gq/T/showship-deck-2ZEKJ6/paper_mark.png">    </p:cNvPr>
+          <p:cNvPr id="6" name="Image 0" descr="/var/folders/lw/rmylcyvd5rjfxk9g1z9rrm8w0000gq/T/showship-deck-tqWCrW/paper_mark.png">    </p:cNvPr>
           <p:cNvPicPr>
             <a:picLocks noChangeAspect="1"/>
           </p:cNvPicPr>
@@ -11901,7 +11901,7 @@
       </p:sp>
       <p:pic>
         <p:nvPicPr>
-          <p:cNvPr id="6" name="Image 0" descr="/var/folders/lw/rmylcyvd5rjfxk9g1z9rrm8w0000gq/T/showship-deck-2ZEKJ6/paper_mark.png">    </p:cNvPr>
+          <p:cNvPr id="6" name="Image 0" descr="/var/folders/lw/rmylcyvd5rjfxk9g1z9rrm8w0000gq/T/showship-deck-tqWCrW/paper_mark.png">    </p:cNvPr>
           <p:cNvPicPr>
             <a:picLocks noChangeAspect="1"/>
           </p:cNvPicPr>
@@ -12974,7 +12974,7 @@
       </p:sp>
       <p:pic>
         <p:nvPicPr>
-          <p:cNvPr id="6" name="Image 0" descr="/var/folders/lw/rmylcyvd5rjfxk9g1z9rrm8w0000gq/T/showship-deck-2ZEKJ6/paper_mark.png">    </p:cNvPr>
+          <p:cNvPr id="6" name="Image 0" descr="/var/folders/lw/rmylcyvd5rjfxk9g1z9rrm8w0000gq/T/showship-deck-tqWCrW/paper_mark.png">    </p:cNvPr>
           <p:cNvPicPr>
             <a:picLocks noChangeAspect="1"/>
           </p:cNvPicPr>
@@ -13680,7 +13680,7 @@
       </p:sp>
       <p:pic>
         <p:nvPicPr>
-          <p:cNvPr id="6" name="Image 0" descr="/var/folders/lw/rmylcyvd5rjfxk9g1z9rrm8w0000gq/T/showship-deck-2ZEKJ6/paper_mark.png">    </p:cNvPr>
+          <p:cNvPr id="6" name="Image 0" descr="/var/folders/lw/rmylcyvd5rjfxk9g1z9rrm8w0000gq/T/showship-deck-tqWCrW/paper_mark.png">    </p:cNvPr>
           <p:cNvPicPr>
             <a:picLocks noChangeAspect="1"/>
           </p:cNvPicPr>

--- a/src/assets/downloads/example-deck-paper.pptx
+++ b/src/assets/downloads/example-deck-paper.pptx
@@ -2351,7 +2351,7 @@
       </p:grpSpPr>
       <p:pic>
         <p:nvPicPr>
-          <p:cNvPr id="2" name="Image 0" descr="/var/folders/lw/rmylcyvd5rjfxk9g1z9rrm8w0000gq/T/showship-deck-tqWCrW/paper_cover.png">    </p:cNvPr>
+          <p:cNvPr id="2" name="Image 0" descr="/var/folders/lw/rmylcyvd5rjfxk9g1z9rrm8w0000gq/T/showship-deck-nB4gwy/paper_cover.png">    </p:cNvPr>
           <p:cNvPicPr>
             <a:picLocks noChangeAspect="1"/>
           </p:cNvPicPr>
@@ -2375,7 +2375,7 @@
       </p:pic>
       <p:pic>
         <p:nvPicPr>
-          <p:cNvPr id="3" name="Image 1" descr="/var/folders/lw/rmylcyvd5rjfxk9g1z9rrm8w0000gq/T/showship-deck-tqWCrW/logo_trimmed.png">    </p:cNvPr>
+          <p:cNvPr id="3" name="Image 1" descr="/var/folders/lw/rmylcyvd5rjfxk9g1z9rrm8w0000gq/T/showship-deck-nB4gwy/logo_trimmed.png">    </p:cNvPr>
           <p:cNvPicPr>
             <a:picLocks noChangeAspect="1"/>
           </p:cNvPicPr>
@@ -2936,7 +2936,7 @@
       </p:sp>
       <p:pic>
         <p:nvPicPr>
-          <p:cNvPr id="6" name="Image 0" descr="/var/folders/lw/rmylcyvd5rjfxk9g1z9rrm8w0000gq/T/showship-deck-tqWCrW/paper_mark.png">    </p:cNvPr>
+          <p:cNvPr id="6" name="Image 0" descr="/var/folders/lw/rmylcyvd5rjfxk9g1z9rrm8w0000gq/T/showship-deck-nB4gwy/paper_mark.png">    </p:cNvPr>
           <p:cNvPicPr>
             <a:picLocks noChangeAspect="1"/>
           </p:cNvPicPr>
@@ -3561,7 +3561,7 @@
       </p:sp>
       <p:pic>
         <p:nvPicPr>
-          <p:cNvPr id="6" name="Image 0" descr="/var/folders/lw/rmylcyvd5rjfxk9g1z9rrm8w0000gq/T/showship-deck-tqWCrW/paper_mark.png">    </p:cNvPr>
+          <p:cNvPr id="6" name="Image 0" descr="/var/folders/lw/rmylcyvd5rjfxk9g1z9rrm8w0000gq/T/showship-deck-nB4gwy/paper_mark.png">    </p:cNvPr>
           <p:cNvPicPr>
             <a:picLocks noChangeAspect="1"/>
           </p:cNvPicPr>
@@ -4728,7 +4728,7 @@
       </p:grpSpPr>
       <p:pic>
         <p:nvPicPr>
-          <p:cNvPr id="2" name="Image 0" descr="/var/folders/lw/rmylcyvd5rjfxk9g1z9rrm8w0000gq/T/showship-deck-tqWCrW/paper_cover.png">    </p:cNvPr>
+          <p:cNvPr id="2" name="Image 0" descr="/var/folders/lw/rmylcyvd5rjfxk9g1z9rrm8w0000gq/T/showship-deck-nB4gwy/paper_cover.png">    </p:cNvPr>
           <p:cNvPicPr>
             <a:picLocks noChangeAspect="1"/>
           </p:cNvPicPr>
@@ -4752,7 +4752,7 @@
       </p:pic>
       <p:pic>
         <p:nvPicPr>
-          <p:cNvPr id="3" name="Image 1" descr="/var/folders/lw/rmylcyvd5rjfxk9g1z9rrm8w0000gq/T/showship-deck-tqWCrW/logo_trimmed.png">    </p:cNvPr>
+          <p:cNvPr id="3" name="Image 1" descr="/var/folders/lw/rmylcyvd5rjfxk9g1z9rrm8w0000gq/T/showship-deck-nB4gwy/logo_trimmed.png">    </p:cNvPr>
           <p:cNvPicPr>
             <a:picLocks noChangeAspect="1"/>
           </p:cNvPicPr>
@@ -5235,7 +5235,7 @@
       </p:sp>
       <p:pic>
         <p:nvPicPr>
-          <p:cNvPr id="6" name="Image 0" descr="/var/folders/lw/rmylcyvd5rjfxk9g1z9rrm8w0000gq/T/showship-deck-tqWCrW/paper_mark.png">    </p:cNvPr>
+          <p:cNvPr id="6" name="Image 0" descr="/var/folders/lw/rmylcyvd5rjfxk9g1z9rrm8w0000gq/T/showship-deck-nB4gwy/paper_mark.png">    </p:cNvPr>
           <p:cNvPicPr>
             <a:picLocks noChangeAspect="1"/>
           </p:cNvPicPr>
@@ -6341,7 +6341,7 @@
       </p:sp>
       <p:pic>
         <p:nvPicPr>
-          <p:cNvPr id="6" name="Image 0" descr="/var/folders/lw/rmylcyvd5rjfxk9g1z9rrm8w0000gq/T/showship-deck-tqWCrW/paper_mark.png">    </p:cNvPr>
+          <p:cNvPr id="6" name="Image 0" descr="/var/folders/lw/rmylcyvd5rjfxk9g1z9rrm8w0000gq/T/showship-deck-nB4gwy/paper_mark.png">    </p:cNvPr>
           <p:cNvPicPr>
             <a:picLocks noChangeAspect="1"/>
           </p:cNvPicPr>
@@ -6565,7 +6565,7 @@
       </p:sp>
       <p:pic>
         <p:nvPicPr>
-          <p:cNvPr id="12" name="Image 1" descr="/var/folders/lw/rmylcyvd5rjfxk9g1z9rrm8w0000gq/T/showship-deck-tqWCrW/paper_tl_1.png">    </p:cNvPr>
+          <p:cNvPr id="12" name="Image 1" descr="/var/folders/lw/rmylcyvd5rjfxk9g1z9rrm8w0000gq/T/showship-deck-nB4gwy/paper_tl_1.png">    </p:cNvPr>
           <p:cNvPicPr>
             <a:picLocks noChangeAspect="1"/>
           </p:cNvPicPr>
@@ -7359,7 +7359,7 @@
       </p:sp>
       <p:pic>
         <p:nvPicPr>
-          <p:cNvPr id="6" name="Image 0" descr="/var/folders/lw/rmylcyvd5rjfxk9g1z9rrm8w0000gq/T/showship-deck-tqWCrW/paper_mark.png">    </p:cNvPr>
+          <p:cNvPr id="6" name="Image 0" descr="/var/folders/lw/rmylcyvd5rjfxk9g1z9rrm8w0000gq/T/showship-deck-nB4gwy/paper_mark.png">    </p:cNvPr>
           <p:cNvPicPr>
             <a:picLocks noChangeAspect="1"/>
           </p:cNvPicPr>
@@ -8495,7 +8495,7 @@
       </p:sp>
       <p:pic>
         <p:nvPicPr>
-          <p:cNvPr id="6" name="Image 0" descr="/var/folders/lw/rmylcyvd5rjfxk9g1z9rrm8w0000gq/T/showship-deck-tqWCrW/paper_mark.png">    </p:cNvPr>
+          <p:cNvPr id="6" name="Image 0" descr="/var/folders/lw/rmylcyvd5rjfxk9g1z9rrm8w0000gq/T/showship-deck-nB4gwy/paper_mark.png">    </p:cNvPr>
           <p:cNvPicPr>
             <a:picLocks noChangeAspect="1"/>
           </p:cNvPicPr>
@@ -10068,7 +10068,7 @@
       </p:sp>
       <p:pic>
         <p:nvPicPr>
-          <p:cNvPr id="6" name="Image 0" descr="/var/folders/lw/rmylcyvd5rjfxk9g1z9rrm8w0000gq/T/showship-deck-tqWCrW/paper_mark.png">    </p:cNvPr>
+          <p:cNvPr id="6" name="Image 0" descr="/var/folders/lw/rmylcyvd5rjfxk9g1z9rrm8w0000gq/T/showship-deck-nB4gwy/paper_mark.png">    </p:cNvPr>
           <p:cNvPicPr>
             <a:picLocks noChangeAspect="1"/>
           </p:cNvPicPr>
@@ -11901,7 +11901,7 @@
       </p:sp>
       <p:pic>
         <p:nvPicPr>
-          <p:cNvPr id="6" name="Image 0" descr="/var/folders/lw/rmylcyvd5rjfxk9g1z9rrm8w0000gq/T/showship-deck-tqWCrW/paper_mark.png">    </p:cNvPr>
+          <p:cNvPr id="6" name="Image 0" descr="/var/folders/lw/rmylcyvd5rjfxk9g1z9rrm8w0000gq/T/showship-deck-nB4gwy/paper_mark.png">    </p:cNvPr>
           <p:cNvPicPr>
             <a:picLocks noChangeAspect="1"/>
           </p:cNvPicPr>
@@ -12974,7 +12974,7 @@
       </p:sp>
       <p:pic>
         <p:nvPicPr>
-          <p:cNvPr id="6" name="Image 0" descr="/var/folders/lw/rmylcyvd5rjfxk9g1z9rrm8w0000gq/T/showship-deck-tqWCrW/paper_mark.png">    </p:cNvPr>
+          <p:cNvPr id="6" name="Image 0" descr="/var/folders/lw/rmylcyvd5rjfxk9g1z9rrm8w0000gq/T/showship-deck-nB4gwy/paper_mark.png">    </p:cNvPr>
           <p:cNvPicPr>
             <a:picLocks noChangeAspect="1"/>
           </p:cNvPicPr>
@@ -13680,7 +13680,7 @@
       </p:sp>
       <p:pic>
         <p:nvPicPr>
-          <p:cNvPr id="6" name="Image 0" descr="/var/folders/lw/rmylcyvd5rjfxk9g1z9rrm8w0000gq/T/showship-deck-tqWCrW/paper_mark.png">    </p:cNvPr>
+          <p:cNvPr id="6" name="Image 0" descr="/var/folders/lw/rmylcyvd5rjfxk9g1z9rrm8w0000gq/T/showship-deck-nB4gwy/paper_mark.png">    </p:cNvPr>
           <p:cNvPicPr>
             <a:picLocks noChangeAspect="1"/>
           </p:cNvPicPr>
